--- a/docs/FoundIt-Presentation.pptx
+++ b/docs/FoundIt-Presentation.pptx
@@ -1969,7 +1969,7 @@
           <a:p>
             <a:r>
               <a:rPr lang="en-US" dirty="0"/>
-              <a:t>Eight functions, split between document triggers and callable RPCs. Everything security-critical lives here rather than in the client.</a:t>
+              <a:t>Nine functions, split between document triggers and callable RPCs. Everything security-critical lives here rather than in the client. onClaimCreated is what makes the claim visible to the finder — without it FR-10 could not complete.</a:t>
             </a:r>
             <a:endParaRPr lang="en-US" dirty="0"/>
           </a:p>
@@ -12694,7 +12694,7 @@
                 <a:ea typeface="Poppins" pitchFamily="34" charset="-122"/>
                 <a:cs typeface="Poppins" pitchFamily="34" charset="-120"/>
               </a:rPr>
-              <a:t>suggestMatches · onClaimResolved · onReviewCreated · onFlagCreated · confirmTransaction · resolveFlag · recomputeTrustScore · setUserRole</a:t>
+              <a:t>suggestMatches · onClaimCreated · onClaimResolved · onReviewCreated · onFlagCreated · confirmTransaction · resolveFlag · recomputeTrustScore · setUserRole</a:t>
             </a:r>
             <a:endParaRPr lang="en-US" sz="1000" dirty="0"/>
           </a:p>
@@ -19898,18 +19898,57 @@
       </p:sp>
       <p:sp>
         <p:nvSpPr>
-          <p:cNvPr id="4" name="Shape 2"/>
+          <p:cNvPr id="4" name="Text 2"/>
+          <p:cNvSpPr txBox="1"/>
+          <p:nvPr/>
+        </p:nvSpPr>
+        <p:spPr>
+          <a:xfrm>
+            <a:off x="566928" y="1115568"/>
+            <a:ext cx="11057839" cy="292608"/>
+          </a:xfrm>
+          <a:prstGeom prst="rect">
+            <a:avLst/>
+          </a:prstGeom>
+          <a:noFill/>
+          <a:ln/>
+        </p:spPr>
+        <p:txBody>
+          <a:bodyPr wrap="square" lIns="0" tIns="0" rIns="0" bIns="0" rtlCol="0" anchor="ctr"/>
+          <a:lstStyle/>
+          <a:p>
+            <a:pPr indent="0" marL="0">
+              <a:buNone/>
+            </a:pPr>
+            <a:r>
+              <a:rPr lang="en-US" sz="1200" dirty="0">
+                <a:solidFill>
+                  <a:srgbClr val="76708E"/>
+                </a:solidFill>
+                <a:latin typeface="Poppins" pitchFamily="34" charset="0"/>
+                <a:ea typeface="Poppins" pitchFamily="34" charset="-122"/>
+                <a:cs typeface="Poppins" pitchFamily="34" charset="-120"/>
+              </a:rPr>
+              <a:t>Cloud Functions v2 on Node 22 · triggers react to document lifecycle events, onCall functions are invoked from the client over HTTPS</a:t>
+            </a:r>
+            <a:endParaRPr lang="en-US" sz="1200" dirty="0"/>
+          </a:p>
+        </p:txBody>
+      </p:sp>
+      <p:sp>
+        <p:nvSpPr>
+          <p:cNvPr id="5" name="Shape 3"/>
           <p:cNvSpPr/>
           <p:nvPr/>
         </p:nvSpPr>
         <p:spPr>
           <a:xfrm>
-            <a:off x="566928" y="1554480"/>
-            <a:ext cx="2572436" cy="1938528"/>
+            <a:off x="566928" y="1700784"/>
+            <a:ext cx="3515258" cy="1426464"/>
           </a:xfrm>
           <a:prstGeom prst="roundRect">
             <a:avLst>
-              <a:gd name="adj" fmla="val 5660"/>
+              <a:gd name="adj" fmla="val 7692"/>
             </a:avLst>
           </a:prstGeom>
           <a:solidFill>
@@ -19932,13 +19971,13 @@
       </p:sp>
       <p:sp>
         <p:nvSpPr>
-          <p:cNvPr id="5" name="Shape 3"/>
+          <p:cNvPr id="6" name="Shape 4"/>
           <p:cNvSpPr/>
           <p:nvPr/>
         </p:nvSpPr>
         <p:spPr>
           <a:xfrm>
-            <a:off x="804672" y="1792224"/>
+            <a:off x="804672" y="1901952"/>
             <a:ext cx="1393546" cy="274320"/>
           </a:xfrm>
           <a:prstGeom prst="roundRect">
@@ -19959,13 +19998,13 @@
       </p:sp>
       <p:sp>
         <p:nvSpPr>
-          <p:cNvPr id="6" name="Text 4"/>
-          <p:cNvSpPr txBox="1"/>
-          <p:nvPr/>
-        </p:nvSpPr>
-        <p:spPr>
-          <a:xfrm>
-            <a:off x="804672" y="1792224"/>
+          <p:cNvPr id="7" name="Text 5"/>
+          <p:cNvSpPr txBox="1"/>
+          <p:nvPr/>
+        </p:nvSpPr>
+        <p:spPr>
+          <a:xfrm>
+            <a:off x="804672" y="1901952"/>
             <a:ext cx="1393546" cy="274320"/>
           </a:xfrm>
           <a:prstGeom prst="rect">
@@ -19998,14 +20037,14 @@
       </p:sp>
       <p:sp>
         <p:nvSpPr>
-          <p:cNvPr id="7" name="Text 5"/>
-          <p:cNvSpPr txBox="1"/>
-          <p:nvPr/>
-        </p:nvSpPr>
-        <p:spPr>
-          <a:xfrm>
-            <a:off x="804672" y="2231136"/>
-            <a:ext cx="2096948" cy="310896"/>
+          <p:cNvPr id="8" name="Text 6"/>
+          <p:cNvSpPr txBox="1"/>
+          <p:nvPr/>
+        </p:nvSpPr>
+        <p:spPr>
+          <a:xfrm>
+            <a:off x="804672" y="2267712"/>
+            <a:ext cx="3039770" cy="292608"/>
           </a:xfrm>
           <a:prstGeom prst="rect">
             <a:avLst/>
@@ -20037,14 +20076,14 @@
       </p:sp>
       <p:sp>
         <p:nvSpPr>
-          <p:cNvPr id="8" name="Text 6"/>
-          <p:cNvSpPr txBox="1"/>
-          <p:nvPr/>
-        </p:nvSpPr>
-        <p:spPr>
-          <a:xfrm>
-            <a:off x="804672" y="2596896"/>
-            <a:ext cx="2096948" cy="731520"/>
+          <p:cNvPr id="9" name="Text 7"/>
+          <p:cNvSpPr txBox="1"/>
+          <p:nvPr/>
+        </p:nvSpPr>
+        <p:spPr>
+          <a:xfrm>
+            <a:off x="804672" y="2578608"/>
+            <a:ext cx="3039770" cy="457200"/>
           </a:xfrm>
           <a:prstGeom prst="rect">
             <a:avLst/>
@@ -20071,7 +20110,7 @@
                 <a:ea typeface="Poppins" pitchFamily="34" charset="-122"/>
                 <a:cs typeface="Poppins" pitchFamily="34" charset="-120"/>
               </a:rPr>
-              <a:t>Scores every lost / found pair and writes matchedWith, matchScore and notifications.</a:t>
+              <a:t>Scores every lost / found pair, writes the match onto both reports and notifies both posters.</a:t>
             </a:r>
             <a:endParaRPr lang="en-US" sz="960" dirty="0"/>
           </a:p>
@@ -20079,18 +20118,18 @@
       </p:sp>
       <p:sp>
         <p:nvSpPr>
-          <p:cNvPr id="9" name="Shape 7"/>
+          <p:cNvPr id="10" name="Shape 8"/>
           <p:cNvSpPr/>
           <p:nvPr/>
         </p:nvSpPr>
         <p:spPr>
           <a:xfrm>
-            <a:off x="3395396" y="1554480"/>
-            <a:ext cx="2572436" cy="1938528"/>
+            <a:off x="4338218" y="1700784"/>
+            <a:ext cx="3515258" cy="1426464"/>
           </a:xfrm>
           <a:prstGeom prst="roundRect">
             <a:avLst>
-              <a:gd name="adj" fmla="val 5660"/>
+              <a:gd name="adj" fmla="val 7692"/>
             </a:avLst>
           </a:prstGeom>
           <a:solidFill>
@@ -20113,13 +20152,13 @@
       </p:sp>
       <p:sp>
         <p:nvSpPr>
-          <p:cNvPr id="10" name="Shape 8"/>
+          <p:cNvPr id="11" name="Shape 9"/>
           <p:cNvSpPr/>
           <p:nvPr/>
         </p:nvSpPr>
         <p:spPr>
           <a:xfrm>
-            <a:off x="3633140" y="1792224"/>
+            <a:off x="4575962" y="1901952"/>
             <a:ext cx="1393546" cy="274320"/>
           </a:xfrm>
           <a:prstGeom prst="roundRect">
@@ -20140,13 +20179,13 @@
       </p:sp>
       <p:sp>
         <p:nvSpPr>
-          <p:cNvPr id="11" name="Text 9"/>
-          <p:cNvSpPr txBox="1"/>
-          <p:nvPr/>
-        </p:nvSpPr>
-        <p:spPr>
-          <a:xfrm>
-            <a:off x="3633140" y="1792224"/>
+          <p:cNvPr id="12" name="Text 10"/>
+          <p:cNvSpPr txBox="1"/>
+          <p:nvPr/>
+        </p:nvSpPr>
+        <p:spPr>
+          <a:xfrm>
+            <a:off x="4575962" y="1901952"/>
             <a:ext cx="1393546" cy="274320"/>
           </a:xfrm>
           <a:prstGeom prst="rect">
@@ -20171,7 +20210,7 @@
                 <a:ea typeface="Poppins" pitchFamily="34" charset="-122"/>
                 <a:cs typeface="Poppins" pitchFamily="34" charset="-120"/>
               </a:rPr>
-              <a:t>onDocumentWritten</a:t>
+              <a:t>onDocumentCreated</a:t>
             </a:r>
             <a:endParaRPr lang="en-US" sz="850" dirty="0"/>
           </a:p>
@@ -20179,14 +20218,14 @@
       </p:sp>
       <p:sp>
         <p:nvSpPr>
-          <p:cNvPr id="12" name="Text 10"/>
-          <p:cNvSpPr txBox="1"/>
-          <p:nvPr/>
-        </p:nvSpPr>
-        <p:spPr>
-          <a:xfrm>
-            <a:off x="3633140" y="2231136"/>
-            <a:ext cx="2096948" cy="310896"/>
+          <p:cNvPr id="13" name="Text 11"/>
+          <p:cNvSpPr txBox="1"/>
+          <p:nvPr/>
+        </p:nvSpPr>
+        <p:spPr>
+          <a:xfrm>
+            <a:off x="4575962" y="2267712"/>
+            <a:ext cx="3039770" cy="292608"/>
           </a:xfrm>
           <a:prstGeom prst="rect">
             <a:avLst/>
@@ -20210,7 +20249,7 @@
                 <a:ea typeface="Poppins" pitchFamily="34" charset="-122"/>
                 <a:cs typeface="Poppins" pitchFamily="34" charset="-120"/>
               </a:rPr>
-              <a:t>onClaimResolved</a:t>
+              <a:t>onClaimCreated</a:t>
             </a:r>
             <a:endParaRPr lang="en-US" sz="1200" dirty="0"/>
           </a:p>
@@ -20218,14 +20257,14 @@
       </p:sp>
       <p:sp>
         <p:nvSpPr>
-          <p:cNvPr id="13" name="Text 11"/>
-          <p:cNvSpPr txBox="1"/>
-          <p:nvPr/>
-        </p:nvSpPr>
-        <p:spPr>
-          <a:xfrm>
-            <a:off x="3633140" y="2596896"/>
-            <a:ext cx="2096948" cy="731520"/>
+          <p:cNvPr id="14" name="Text 12"/>
+          <p:cNvSpPr txBox="1"/>
+          <p:nvPr/>
+        </p:nvSpPr>
+        <p:spPr>
+          <a:xfrm>
+            <a:off x="4575962" y="2578608"/>
+            <a:ext cx="3039770" cy="457200"/>
           </a:xfrm>
           <a:prstGeom prst="rect">
             <a:avLst/>
@@ -20252,7 +20291,7 @@
                 <a:ea typeface="Poppins" pitchFamily="34" charset="-122"/>
                 <a:cs typeface="Poppins" pitchFamily="34" charset="-120"/>
               </a:rPr>
-              <a:t>Updates item status and user stats, recomputes trust, notifies the claimant.</a:t>
+              <a:t>Tells the item's poster a claim is waiting, so they can approve or reject it.</a:t>
             </a:r>
             <a:endParaRPr lang="en-US" sz="960" dirty="0"/>
           </a:p>
@@ -20260,18 +20299,18 @@
       </p:sp>
       <p:sp>
         <p:nvSpPr>
-          <p:cNvPr id="14" name="Shape 12"/>
+          <p:cNvPr id="15" name="Shape 13"/>
           <p:cNvSpPr/>
           <p:nvPr/>
         </p:nvSpPr>
         <p:spPr>
           <a:xfrm>
-            <a:off x="6223864" y="1554480"/>
-            <a:ext cx="2572436" cy="1938528"/>
+            <a:off x="8109509" y="1700784"/>
+            <a:ext cx="3515258" cy="1426464"/>
           </a:xfrm>
           <a:prstGeom prst="roundRect">
             <a:avLst>
-              <a:gd name="adj" fmla="val 5660"/>
+              <a:gd name="adj" fmla="val 7692"/>
             </a:avLst>
           </a:prstGeom>
           <a:solidFill>
@@ -20294,13 +20333,13 @@
       </p:sp>
       <p:sp>
         <p:nvSpPr>
-          <p:cNvPr id="15" name="Shape 13"/>
+          <p:cNvPr id="16" name="Shape 14"/>
           <p:cNvSpPr/>
           <p:nvPr/>
         </p:nvSpPr>
         <p:spPr>
           <a:xfrm>
-            <a:off x="6461608" y="1792224"/>
+            <a:off x="8347253" y="1901952"/>
             <a:ext cx="1393546" cy="274320"/>
           </a:xfrm>
           <a:prstGeom prst="roundRect">
@@ -20321,13 +20360,13 @@
       </p:sp>
       <p:sp>
         <p:nvSpPr>
-          <p:cNvPr id="16" name="Text 14"/>
-          <p:cNvSpPr txBox="1"/>
-          <p:nvPr/>
-        </p:nvSpPr>
-        <p:spPr>
-          <a:xfrm>
-            <a:off x="6461608" y="1792224"/>
+          <p:cNvPr id="17" name="Text 15"/>
+          <p:cNvSpPr txBox="1"/>
+          <p:nvPr/>
+        </p:nvSpPr>
+        <p:spPr>
+          <a:xfrm>
+            <a:off x="8347253" y="1901952"/>
             <a:ext cx="1393546" cy="274320"/>
           </a:xfrm>
           <a:prstGeom prst="rect">
@@ -20352,7 +20391,7 @@
                 <a:ea typeface="Poppins" pitchFamily="34" charset="-122"/>
                 <a:cs typeface="Poppins" pitchFamily="34" charset="-120"/>
               </a:rPr>
-              <a:t>onDocumentCreated</a:t>
+              <a:t>onDocumentWritten</a:t>
             </a:r>
             <a:endParaRPr lang="en-US" sz="850" dirty="0"/>
           </a:p>
@@ -20360,14 +20399,14 @@
       </p:sp>
       <p:sp>
         <p:nvSpPr>
-          <p:cNvPr id="17" name="Text 15"/>
-          <p:cNvSpPr txBox="1"/>
-          <p:nvPr/>
-        </p:nvSpPr>
-        <p:spPr>
-          <a:xfrm>
-            <a:off x="6461608" y="2231136"/>
-            <a:ext cx="2096948" cy="310896"/>
+          <p:cNvPr id="18" name="Text 16"/>
+          <p:cNvSpPr txBox="1"/>
+          <p:nvPr/>
+        </p:nvSpPr>
+        <p:spPr>
+          <a:xfrm>
+            <a:off x="8347253" y="2267712"/>
+            <a:ext cx="3039770" cy="292608"/>
           </a:xfrm>
           <a:prstGeom prst="rect">
             <a:avLst/>
@@ -20391,7 +20430,7 @@
                 <a:ea typeface="Poppins" pitchFamily="34" charset="-122"/>
                 <a:cs typeface="Poppins" pitchFamily="34" charset="-120"/>
               </a:rPr>
-              <a:t>onReviewCreated</a:t>
+              <a:t>onClaimResolved</a:t>
             </a:r>
             <a:endParaRPr lang="en-US" sz="1200" dirty="0"/>
           </a:p>
@@ -20399,14 +20438,14 @@
       </p:sp>
       <p:sp>
         <p:nvSpPr>
-          <p:cNvPr id="18" name="Text 16"/>
-          <p:cNvSpPr txBox="1"/>
-          <p:nvPr/>
-        </p:nvSpPr>
-        <p:spPr>
-          <a:xfrm>
-            <a:off x="6461608" y="2596896"/>
-            <a:ext cx="2096948" cy="731520"/>
+          <p:cNvPr id="19" name="Text 17"/>
+          <p:cNvSpPr txBox="1"/>
+          <p:nvPr/>
+        </p:nvSpPr>
+        <p:spPr>
+          <a:xfrm>
+            <a:off x="8347253" y="2578608"/>
+            <a:ext cx="3039770" cy="457200"/>
           </a:xfrm>
           <a:prstGeom prst="rect">
             <a:avLst/>
@@ -20433,7 +20472,7 @@
                 <a:ea typeface="Poppins" pitchFamily="34" charset="-122"/>
                 <a:cs typeface="Poppins" pitchFamily="34" charset="-120"/>
               </a:rPr>
-              <a:t>Aggregates the rating average and recomputes the ratee's trust score.</a:t>
+              <a:t>Updates item status and user stats, recomputes trust, notifies the claimant.</a:t>
             </a:r>
             <a:endParaRPr lang="en-US" sz="960" dirty="0"/>
           </a:p>
@@ -20441,18 +20480,18 @@
       </p:sp>
       <p:sp>
         <p:nvSpPr>
-          <p:cNvPr id="19" name="Shape 17"/>
+          <p:cNvPr id="20" name="Shape 18"/>
           <p:cNvSpPr/>
           <p:nvPr/>
         </p:nvSpPr>
         <p:spPr>
           <a:xfrm>
-            <a:off x="9052331" y="1554480"/>
-            <a:ext cx="2572436" cy="1938528"/>
+            <a:off x="566928" y="3291840"/>
+            <a:ext cx="3515258" cy="1426464"/>
           </a:xfrm>
           <a:prstGeom prst="roundRect">
             <a:avLst>
-              <a:gd name="adj" fmla="val 5660"/>
+              <a:gd name="adj" fmla="val 7692"/>
             </a:avLst>
           </a:prstGeom>
           <a:solidFill>
@@ -20475,13 +20514,13 @@
       </p:sp>
       <p:sp>
         <p:nvSpPr>
-          <p:cNvPr id="20" name="Shape 18"/>
+          <p:cNvPr id="21" name="Shape 19"/>
           <p:cNvSpPr/>
           <p:nvPr/>
         </p:nvSpPr>
         <p:spPr>
           <a:xfrm>
-            <a:off x="9290075" y="1792224"/>
+            <a:off x="804672" y="3493008"/>
             <a:ext cx="1393546" cy="274320"/>
           </a:xfrm>
           <a:prstGeom prst="roundRect">
@@ -20502,13 +20541,13 @@
       </p:sp>
       <p:sp>
         <p:nvSpPr>
-          <p:cNvPr id="21" name="Text 19"/>
-          <p:cNvSpPr txBox="1"/>
-          <p:nvPr/>
-        </p:nvSpPr>
-        <p:spPr>
-          <a:xfrm>
-            <a:off x="9290075" y="1792224"/>
+          <p:cNvPr id="22" name="Text 20"/>
+          <p:cNvSpPr txBox="1"/>
+          <p:nvPr/>
+        </p:nvSpPr>
+        <p:spPr>
+          <a:xfrm>
+            <a:off x="804672" y="3493008"/>
             <a:ext cx="1393546" cy="274320"/>
           </a:xfrm>
           <a:prstGeom prst="rect">
@@ -20541,14 +20580,14 @@
       </p:sp>
       <p:sp>
         <p:nvSpPr>
-          <p:cNvPr id="22" name="Text 20"/>
-          <p:cNvSpPr txBox="1"/>
-          <p:nvPr/>
-        </p:nvSpPr>
-        <p:spPr>
-          <a:xfrm>
-            <a:off x="9290075" y="2231136"/>
-            <a:ext cx="2096948" cy="310896"/>
+          <p:cNvPr id="23" name="Text 21"/>
+          <p:cNvSpPr txBox="1"/>
+          <p:nvPr/>
+        </p:nvSpPr>
+        <p:spPr>
+          <a:xfrm>
+            <a:off x="804672" y="3858768"/>
+            <a:ext cx="3039770" cy="292608"/>
           </a:xfrm>
           <a:prstGeom prst="rect">
             <a:avLst/>
@@ -20572,7 +20611,7 @@
                 <a:ea typeface="Poppins" pitchFamily="34" charset="-122"/>
                 <a:cs typeface="Poppins" pitchFamily="34" charset="-120"/>
               </a:rPr>
-              <a:t>onFlagCreated</a:t>
+              <a:t>onReviewCreated</a:t>
             </a:r>
             <a:endParaRPr lang="en-US" sz="1200" dirty="0"/>
           </a:p>
@@ -20580,14 +20619,14 @@
       </p:sp>
       <p:sp>
         <p:nvSpPr>
-          <p:cNvPr id="23" name="Text 21"/>
-          <p:cNvSpPr txBox="1"/>
-          <p:nvPr/>
-        </p:nvSpPr>
-        <p:spPr>
-          <a:xfrm>
-            <a:off x="9290075" y="2596896"/>
-            <a:ext cx="2096948" cy="731520"/>
+          <p:cNvPr id="24" name="Text 22"/>
+          <p:cNvSpPr txBox="1"/>
+          <p:nvPr/>
+        </p:nvSpPr>
+        <p:spPr>
+          <a:xfrm>
+            <a:off x="804672" y="4169664"/>
+            <a:ext cx="3039770" cy="457200"/>
           </a:xfrm>
           <a:prstGeom prst="rect">
             <a:avLst/>
@@ -20614,7 +20653,7 @@
                 <a:ea typeface="Poppins" pitchFamily="34" charset="-122"/>
                 <a:cs typeface="Poppins" pitchFamily="34" charset="-120"/>
               </a:rPr>
-              <a:t>Increments flagCount and auto-hides the target once the threshold is hit.</a:t>
+              <a:t>Aggregates the rating average and recomputes the ratee's trust score.</a:t>
             </a:r>
             <a:endParaRPr lang="en-US" sz="960" dirty="0"/>
           </a:p>
@@ -20622,18 +20661,18 @@
       </p:sp>
       <p:sp>
         <p:nvSpPr>
-          <p:cNvPr id="24" name="Shape 22"/>
+          <p:cNvPr id="25" name="Shape 23"/>
           <p:cNvSpPr/>
           <p:nvPr/>
         </p:nvSpPr>
         <p:spPr>
           <a:xfrm>
-            <a:off x="566928" y="3694176"/>
-            <a:ext cx="2572436" cy="1938528"/>
+            <a:off x="4338218" y="3291840"/>
+            <a:ext cx="3515258" cy="1426464"/>
           </a:xfrm>
           <a:prstGeom prst="roundRect">
             <a:avLst>
-              <a:gd name="adj" fmla="val 5660"/>
+              <a:gd name="adj" fmla="val 7692"/>
             </a:avLst>
           </a:prstGeom>
           <a:solidFill>
@@ -20656,14 +20695,14 @@
       </p:sp>
       <p:sp>
         <p:nvSpPr>
-          <p:cNvPr id="25" name="Shape 23"/>
+          <p:cNvPr id="26" name="Shape 24"/>
           <p:cNvSpPr/>
           <p:nvPr/>
         </p:nvSpPr>
         <p:spPr>
           <a:xfrm>
-            <a:off x="804672" y="3931920"/>
-            <a:ext cx="1196035" cy="274320"/>
+            <a:off x="4575962" y="3493008"/>
+            <a:ext cx="1393546" cy="274320"/>
           </a:xfrm>
           <a:prstGeom prst="roundRect">
             <a:avLst>
@@ -20671,11 +20710,11 @@
             </a:avLst>
           </a:prstGeom>
           <a:solidFill>
-            <a:srgbClr val="D5E5F8"/>
+            <a:srgbClr val="CFEADB"/>
           </a:solidFill>
           <a:ln w="12700">
             <a:solidFill>
-              <a:srgbClr val="D5E5F8"/>
+              <a:srgbClr val="CFEADB"/>
             </a:solidFill>
             <a:prstDash val="solid"/>
           </a:ln>
@@ -20683,14 +20722,14 @@
       </p:sp>
       <p:sp>
         <p:nvSpPr>
-          <p:cNvPr id="26" name="Text 24"/>
-          <p:cNvSpPr txBox="1"/>
-          <p:nvPr/>
-        </p:nvSpPr>
-        <p:spPr>
-          <a:xfrm>
-            <a:off x="804672" y="3931920"/>
-            <a:ext cx="1196035" cy="274320"/>
+          <p:cNvPr id="27" name="Text 25"/>
+          <p:cNvSpPr txBox="1"/>
+          <p:nvPr/>
+        </p:nvSpPr>
+        <p:spPr>
+          <a:xfrm>
+            <a:off x="4575962" y="3493008"/>
+            <a:ext cx="1393546" cy="274320"/>
           </a:xfrm>
           <a:prstGeom prst="rect">
             <a:avLst/>
@@ -20708,13 +20747,13 @@
             <a:r>
               <a:rPr lang="en-US" sz="850" b="1" dirty="0">
                 <a:solidFill>
-                  <a:srgbClr val="34648F"/>
-                </a:solidFill>
-                <a:latin typeface="Poppins" pitchFamily="34" charset="0"/>
-                <a:ea typeface="Poppins" pitchFamily="34" charset="-122"/>
-                <a:cs typeface="Poppins" pitchFamily="34" charset="-120"/>
-              </a:rPr>
-              <a:t>onCall · HTTPS</a:t>
+                  <a:srgbClr val="35805A"/>
+                </a:solidFill>
+                <a:latin typeface="Poppins" pitchFamily="34" charset="0"/>
+                <a:ea typeface="Poppins" pitchFamily="34" charset="-122"/>
+                <a:cs typeface="Poppins" pitchFamily="34" charset="-120"/>
+              </a:rPr>
+              <a:t>onDocumentCreated</a:t>
             </a:r>
             <a:endParaRPr lang="en-US" sz="850" dirty="0"/>
           </a:p>
@@ -20722,14 +20761,14 @@
       </p:sp>
       <p:sp>
         <p:nvSpPr>
-          <p:cNvPr id="27" name="Text 25"/>
-          <p:cNvSpPr txBox="1"/>
-          <p:nvPr/>
-        </p:nvSpPr>
-        <p:spPr>
-          <a:xfrm>
-            <a:off x="804672" y="4370832"/>
-            <a:ext cx="2096948" cy="310896"/>
+          <p:cNvPr id="28" name="Text 26"/>
+          <p:cNvSpPr txBox="1"/>
+          <p:nvPr/>
+        </p:nvSpPr>
+        <p:spPr>
+          <a:xfrm>
+            <a:off x="4575962" y="3858768"/>
+            <a:ext cx="3039770" cy="292608"/>
           </a:xfrm>
           <a:prstGeom prst="rect">
             <a:avLst/>
@@ -20753,7 +20792,7 @@
                 <a:ea typeface="Poppins" pitchFamily="34" charset="-122"/>
                 <a:cs typeface="Poppins" pitchFamily="34" charset="-120"/>
               </a:rPr>
-              <a:t>confirmTransaction</a:t>
+              <a:t>onFlagCreated</a:t>
             </a:r>
             <a:endParaRPr lang="en-US" sz="1200" dirty="0"/>
           </a:p>
@@ -20761,14 +20800,14 @@
       </p:sp>
       <p:sp>
         <p:nvSpPr>
-          <p:cNvPr id="28" name="Text 26"/>
-          <p:cNvSpPr txBox="1"/>
-          <p:nvPr/>
-        </p:nvSpPr>
-        <p:spPr>
-          <a:xfrm>
-            <a:off x="804672" y="4736592"/>
-            <a:ext cx="2096948" cy="731520"/>
+          <p:cNvPr id="29" name="Text 27"/>
+          <p:cNvSpPr txBox="1"/>
+          <p:nvPr/>
+        </p:nvSpPr>
+        <p:spPr>
+          <a:xfrm>
+            <a:off x="4575962" y="4169664"/>
+            <a:ext cx="3039770" cy="457200"/>
           </a:xfrm>
           <a:prstGeom prst="rect">
             <a:avLst/>
@@ -20795,7 +20834,7 @@
                 <a:ea typeface="Poppins" pitchFamily="34" charset="-122"/>
                 <a:cs typeface="Poppins" pitchFamily="34" charset="-120"/>
               </a:rPr>
-              <a:t>Two-party handshake — marks the listing sold once both sides have confirmed.</a:t>
+              <a:t>Increments flagCount and auto-hides the target once the threshold is hit.</a:t>
             </a:r>
             <a:endParaRPr lang="en-US" sz="960" dirty="0"/>
           </a:p>
@@ -20803,18 +20842,18 @@
       </p:sp>
       <p:sp>
         <p:nvSpPr>
-          <p:cNvPr id="29" name="Shape 27"/>
+          <p:cNvPr id="30" name="Shape 28"/>
           <p:cNvSpPr/>
           <p:nvPr/>
         </p:nvSpPr>
         <p:spPr>
           <a:xfrm>
-            <a:off x="3395396" y="3694176"/>
-            <a:ext cx="2572436" cy="1938528"/>
+            <a:off x="8109509" y="3291840"/>
+            <a:ext cx="3515258" cy="1426464"/>
           </a:xfrm>
           <a:prstGeom prst="roundRect">
             <a:avLst>
-              <a:gd name="adj" fmla="val 5660"/>
+              <a:gd name="adj" fmla="val 7692"/>
             </a:avLst>
           </a:prstGeom>
           <a:solidFill>
@@ -20837,13 +20876,13 @@
       </p:sp>
       <p:sp>
         <p:nvSpPr>
-          <p:cNvPr id="30" name="Shape 28"/>
+          <p:cNvPr id="31" name="Shape 29"/>
           <p:cNvSpPr/>
           <p:nvPr/>
         </p:nvSpPr>
         <p:spPr>
           <a:xfrm>
-            <a:off x="3633140" y="3931920"/>
+            <a:off x="8347253" y="3493008"/>
             <a:ext cx="1196035" cy="274320"/>
           </a:xfrm>
           <a:prstGeom prst="roundRect">
@@ -20864,13 +20903,13 @@
       </p:sp>
       <p:sp>
         <p:nvSpPr>
-          <p:cNvPr id="31" name="Text 29"/>
-          <p:cNvSpPr txBox="1"/>
-          <p:nvPr/>
-        </p:nvSpPr>
-        <p:spPr>
-          <a:xfrm>
-            <a:off x="3633140" y="3931920"/>
+          <p:cNvPr id="32" name="Text 30"/>
+          <p:cNvSpPr txBox="1"/>
+          <p:nvPr/>
+        </p:nvSpPr>
+        <p:spPr>
+          <a:xfrm>
+            <a:off x="8347253" y="3493008"/>
             <a:ext cx="1196035" cy="274320"/>
           </a:xfrm>
           <a:prstGeom prst="rect">
@@ -20903,14 +20942,14 @@
       </p:sp>
       <p:sp>
         <p:nvSpPr>
-          <p:cNvPr id="32" name="Text 30"/>
-          <p:cNvSpPr txBox="1"/>
-          <p:nvPr/>
-        </p:nvSpPr>
-        <p:spPr>
-          <a:xfrm>
-            <a:off x="3633140" y="4370832"/>
-            <a:ext cx="2096948" cy="310896"/>
+          <p:cNvPr id="33" name="Text 31"/>
+          <p:cNvSpPr txBox="1"/>
+          <p:nvPr/>
+        </p:nvSpPr>
+        <p:spPr>
+          <a:xfrm>
+            <a:off x="8347253" y="3858768"/>
+            <a:ext cx="3039770" cy="292608"/>
           </a:xfrm>
           <a:prstGeom prst="rect">
             <a:avLst/>
@@ -20934,7 +20973,7 @@
                 <a:ea typeface="Poppins" pitchFamily="34" charset="-122"/>
                 <a:cs typeface="Poppins" pitchFamily="34" charset="-120"/>
               </a:rPr>
-              <a:t>resolveFlag</a:t>
+              <a:t>confirmTransaction</a:t>
             </a:r>
             <a:endParaRPr lang="en-US" sz="1200" dirty="0"/>
           </a:p>
@@ -20942,14 +20981,14 @@
       </p:sp>
       <p:sp>
         <p:nvSpPr>
-          <p:cNvPr id="33" name="Text 31"/>
-          <p:cNvSpPr txBox="1"/>
-          <p:nvPr/>
-        </p:nvSpPr>
-        <p:spPr>
-          <a:xfrm>
-            <a:off x="3633140" y="4736592"/>
-            <a:ext cx="2096948" cy="731520"/>
+          <p:cNvPr id="34" name="Text 32"/>
+          <p:cNvSpPr txBox="1"/>
+          <p:nvPr/>
+        </p:nvSpPr>
+        <p:spPr>
+          <a:xfrm>
+            <a:off x="8347253" y="4169664"/>
+            <a:ext cx="3039770" cy="457200"/>
           </a:xfrm>
           <a:prstGeom prst="rect">
             <a:avLst/>
@@ -20976,7 +21015,7 @@
                 <a:ea typeface="Poppins" pitchFamily="34" charset="-122"/>
                 <a:cs typeface="Poppins" pitchFamily="34" charset="-120"/>
               </a:rPr>
-              <a:t>Closes a flag and optionally applies a strike to the offending user.</a:t>
+              <a:t>Two-party handshake — marks the listing sold once both sides have confirmed.</a:t>
             </a:r>
             <a:endParaRPr lang="en-US" sz="960" dirty="0"/>
           </a:p>
@@ -20984,18 +21023,18 @@
       </p:sp>
       <p:sp>
         <p:nvSpPr>
-          <p:cNvPr id="34" name="Shape 32"/>
+          <p:cNvPr id="35" name="Shape 33"/>
           <p:cNvSpPr/>
           <p:nvPr/>
         </p:nvSpPr>
         <p:spPr>
           <a:xfrm>
-            <a:off x="6223864" y="3694176"/>
-            <a:ext cx="2572436" cy="1938528"/>
+            <a:off x="566928" y="4882896"/>
+            <a:ext cx="3515258" cy="1426464"/>
           </a:xfrm>
           <a:prstGeom prst="roundRect">
             <a:avLst>
-              <a:gd name="adj" fmla="val 5660"/>
+              <a:gd name="adj" fmla="val 7692"/>
             </a:avLst>
           </a:prstGeom>
           <a:solidFill>
@@ -21018,13 +21057,13 @@
       </p:sp>
       <p:sp>
         <p:nvSpPr>
-          <p:cNvPr id="35" name="Shape 33"/>
+          <p:cNvPr id="36" name="Shape 34"/>
           <p:cNvSpPr/>
           <p:nvPr/>
         </p:nvSpPr>
         <p:spPr>
           <a:xfrm>
-            <a:off x="6461608" y="3931920"/>
+            <a:off x="804672" y="5084064"/>
             <a:ext cx="1196035" cy="274320"/>
           </a:xfrm>
           <a:prstGeom prst="roundRect">
@@ -21045,13 +21084,13 @@
       </p:sp>
       <p:sp>
         <p:nvSpPr>
-          <p:cNvPr id="36" name="Text 34"/>
-          <p:cNvSpPr txBox="1"/>
-          <p:nvPr/>
-        </p:nvSpPr>
-        <p:spPr>
-          <a:xfrm>
-            <a:off x="6461608" y="3931920"/>
+          <p:cNvPr id="37" name="Text 35"/>
+          <p:cNvSpPr txBox="1"/>
+          <p:nvPr/>
+        </p:nvSpPr>
+        <p:spPr>
+          <a:xfrm>
+            <a:off x="804672" y="5084064"/>
             <a:ext cx="1196035" cy="274320"/>
           </a:xfrm>
           <a:prstGeom prst="rect">
@@ -21084,14 +21123,14 @@
       </p:sp>
       <p:sp>
         <p:nvSpPr>
-          <p:cNvPr id="37" name="Text 35"/>
-          <p:cNvSpPr txBox="1"/>
-          <p:nvPr/>
-        </p:nvSpPr>
-        <p:spPr>
-          <a:xfrm>
-            <a:off x="6461608" y="4370832"/>
-            <a:ext cx="2096948" cy="310896"/>
+          <p:cNvPr id="38" name="Text 36"/>
+          <p:cNvSpPr txBox="1"/>
+          <p:nvPr/>
+        </p:nvSpPr>
+        <p:spPr>
+          <a:xfrm>
+            <a:off x="804672" y="5449824"/>
+            <a:ext cx="3039770" cy="292608"/>
           </a:xfrm>
           <a:prstGeom prst="rect">
             <a:avLst/>
@@ -21115,7 +21154,7 @@
                 <a:ea typeface="Poppins" pitchFamily="34" charset="-122"/>
                 <a:cs typeface="Poppins" pitchFamily="34" charset="-120"/>
               </a:rPr>
-              <a:t>recomputeTrustScore</a:t>
+              <a:t>resolveFlag</a:t>
             </a:r>
             <a:endParaRPr lang="en-US" sz="1200" dirty="0"/>
           </a:p>
@@ -21123,14 +21162,14 @@
       </p:sp>
       <p:sp>
         <p:nvSpPr>
-          <p:cNvPr id="38" name="Text 36"/>
-          <p:cNvSpPr txBox="1"/>
-          <p:nvPr/>
-        </p:nvSpPr>
-        <p:spPr>
-          <a:xfrm>
-            <a:off x="6461608" y="4736592"/>
-            <a:ext cx="2096948" cy="731520"/>
+          <p:cNvPr id="39" name="Text 37"/>
+          <p:cNvSpPr txBox="1"/>
+          <p:nvPr/>
+        </p:nvSpPr>
+        <p:spPr>
+          <a:xfrm>
+            <a:off x="804672" y="5760720"/>
+            <a:ext cx="3039770" cy="457200"/>
           </a:xfrm>
           <a:prstGeom prst="rect">
             <a:avLst/>
@@ -21157,7 +21196,7 @@
                 <a:ea typeface="Poppins" pitchFamily="34" charset="-122"/>
                 <a:cs typeface="Poppins" pitchFamily="34" charset="-120"/>
               </a:rPr>
-              <a:t>Recalculates trust from ratings, activity, verification, tenure and strikes.</a:t>
+              <a:t>Closes a flag and optionally applies a strike to the offending user.</a:t>
             </a:r>
             <a:endParaRPr lang="en-US" sz="960" dirty="0"/>
           </a:p>
@@ -21165,18 +21204,18 @@
       </p:sp>
       <p:sp>
         <p:nvSpPr>
-          <p:cNvPr id="39" name="Shape 37"/>
+          <p:cNvPr id="40" name="Shape 38"/>
           <p:cNvSpPr/>
           <p:nvPr/>
         </p:nvSpPr>
         <p:spPr>
           <a:xfrm>
-            <a:off x="9052331" y="3694176"/>
-            <a:ext cx="2572436" cy="1938528"/>
+            <a:off x="4338218" y="4882896"/>
+            <a:ext cx="3515258" cy="1426464"/>
           </a:xfrm>
           <a:prstGeom prst="roundRect">
             <a:avLst>
-              <a:gd name="adj" fmla="val 5660"/>
+              <a:gd name="adj" fmla="val 7692"/>
             </a:avLst>
           </a:prstGeom>
           <a:solidFill>
@@ -21199,13 +21238,13 @@
       </p:sp>
       <p:sp>
         <p:nvSpPr>
-          <p:cNvPr id="40" name="Shape 38"/>
+          <p:cNvPr id="41" name="Shape 39"/>
           <p:cNvSpPr/>
           <p:nvPr/>
         </p:nvSpPr>
         <p:spPr>
           <a:xfrm>
-            <a:off x="9290075" y="3931920"/>
+            <a:off x="4575962" y="5084064"/>
             <a:ext cx="1196035" cy="274320"/>
           </a:xfrm>
           <a:prstGeom prst="roundRect">
@@ -21226,13 +21265,13 @@
       </p:sp>
       <p:sp>
         <p:nvSpPr>
-          <p:cNvPr id="41" name="Text 39"/>
-          <p:cNvSpPr txBox="1"/>
-          <p:nvPr/>
-        </p:nvSpPr>
-        <p:spPr>
-          <a:xfrm>
-            <a:off x="9290075" y="3931920"/>
+          <p:cNvPr id="42" name="Text 40"/>
+          <p:cNvSpPr txBox="1"/>
+          <p:nvPr/>
+        </p:nvSpPr>
+        <p:spPr>
+          <a:xfrm>
+            <a:off x="4575962" y="5084064"/>
             <a:ext cx="1196035" cy="274320"/>
           </a:xfrm>
           <a:prstGeom prst="rect">
@@ -21265,14 +21304,14 @@
       </p:sp>
       <p:sp>
         <p:nvSpPr>
-          <p:cNvPr id="42" name="Text 40"/>
-          <p:cNvSpPr txBox="1"/>
-          <p:nvPr/>
-        </p:nvSpPr>
-        <p:spPr>
-          <a:xfrm>
-            <a:off x="9290075" y="4370832"/>
-            <a:ext cx="2096948" cy="310896"/>
+          <p:cNvPr id="43" name="Text 41"/>
+          <p:cNvSpPr txBox="1"/>
+          <p:nvPr/>
+        </p:nvSpPr>
+        <p:spPr>
+          <a:xfrm>
+            <a:off x="4575962" y="5449824"/>
+            <a:ext cx="3039770" cy="292608"/>
           </a:xfrm>
           <a:prstGeom prst="rect">
             <a:avLst/>
@@ -21296,7 +21335,7 @@
                 <a:ea typeface="Poppins" pitchFamily="34" charset="-122"/>
                 <a:cs typeface="Poppins" pitchFamily="34" charset="-120"/>
               </a:rPr>
-              <a:t>setUserRole</a:t>
+              <a:t>recomputeTrustScore</a:t>
             </a:r>
             <a:endParaRPr lang="en-US" sz="1200" dirty="0"/>
           </a:p>
@@ -21304,14 +21343,14 @@
       </p:sp>
       <p:sp>
         <p:nvSpPr>
-          <p:cNvPr id="43" name="Text 41"/>
-          <p:cNvSpPr txBox="1"/>
-          <p:nvPr/>
-        </p:nvSpPr>
-        <p:spPr>
-          <a:xfrm>
-            <a:off x="9290075" y="4736592"/>
-            <a:ext cx="2096948" cy="731520"/>
+          <p:cNvPr id="44" name="Text 42"/>
+          <p:cNvSpPr txBox="1"/>
+          <p:nvPr/>
+        </p:nvSpPr>
+        <p:spPr>
+          <a:xfrm>
+            <a:off x="4575962" y="5760720"/>
+            <a:ext cx="3039770" cy="457200"/>
           </a:xfrm>
           <a:prstGeom prst="rect">
             <a:avLst/>
@@ -21338,7 +21377,7 @@
                 <a:ea typeface="Poppins" pitchFamily="34" charset="-122"/>
                 <a:cs typeface="Poppins" pitchFamily="34" charset="-120"/>
               </a:rPr>
-              <a:t>Admin only — sets the Firebase custom claim and the user document role.</a:t>
+              <a:t>Recalculates trust from ratings, activity, verification, tenure and strikes.</a:t>
             </a:r>
             <a:endParaRPr lang="en-US" sz="960" dirty="0"/>
           </a:p>
@@ -21346,26 +21385,26 @@
       </p:sp>
       <p:sp>
         <p:nvSpPr>
-          <p:cNvPr id="44" name="Shape 42"/>
+          <p:cNvPr id="45" name="Shape 43"/>
           <p:cNvSpPr/>
           <p:nvPr/>
         </p:nvSpPr>
         <p:spPr>
           <a:xfrm>
-            <a:off x="566928" y="5833872"/>
-            <a:ext cx="11057839" cy="548640"/>
+            <a:off x="8109509" y="4882896"/>
+            <a:ext cx="3515258" cy="1426464"/>
           </a:xfrm>
           <a:prstGeom prst="roundRect">
             <a:avLst>
-              <a:gd name="adj" fmla="val 20000"/>
+              <a:gd name="adj" fmla="val 7692"/>
             </a:avLst>
           </a:prstGeom>
           <a:solidFill>
-            <a:srgbClr val="EDE4F9"/>
+            <a:srgbClr val="FBFAFE"/>
           </a:solidFill>
           <a:ln w="12700">
             <a:solidFill>
-              <a:srgbClr val="DFD2F2"/>
+              <a:srgbClr val="E9E3F3"/>
             </a:solidFill>
             <a:prstDash val="solid"/>
           </a:ln>
@@ -21380,40 +21419,148 @@
       </p:sp>
       <p:sp>
         <p:nvSpPr>
-          <p:cNvPr id="45" name="Text 43"/>
-          <p:cNvSpPr txBox="1"/>
-          <p:nvPr/>
-        </p:nvSpPr>
-        <p:spPr>
-          <a:xfrm>
-            <a:off x="932688" y="5971032"/>
-            <a:ext cx="10326319" cy="292608"/>
-          </a:xfrm>
-          <a:prstGeom prst="rect">
-            <a:avLst/>
-          </a:prstGeom>
-          <a:noFill/>
-          <a:ln/>
-        </p:spPr>
-        <p:txBody>
-          <a:bodyPr wrap="square" lIns="0" tIns="0" rIns="0" bIns="0" rtlCol="0" anchor="ctr"/>
-          <a:lstStyle/>
-          <a:p>
-            <a:pPr indent="0" marL="0">
-              <a:buNone/>
-            </a:pPr>
-            <a:r>
-              <a:rPr lang="en-US" sz="1050" dirty="0">
-                <a:solidFill>
-                  <a:srgbClr val="4A4360"/>
-                </a:solidFill>
-                <a:latin typeface="Poppins" pitchFamily="34" charset="0"/>
-                <a:ea typeface="Poppins" pitchFamily="34" charset="-122"/>
-                <a:cs typeface="Poppins" pitchFamily="34" charset="-120"/>
-              </a:rPr>
-              <a:t>Cloud Functions v2 on Node 22. Trigger functions react to document lifecycle events; onCall functions are invoked directly from the client over HTTPS.</a:t>
-            </a:r>
-            <a:endParaRPr lang="en-US" sz="1050" dirty="0"/>
+          <p:cNvPr id="46" name="Shape 44"/>
+          <p:cNvSpPr/>
+          <p:nvPr/>
+        </p:nvSpPr>
+        <p:spPr>
+          <a:xfrm>
+            <a:off x="8347253" y="5084064"/>
+            <a:ext cx="1196035" cy="274320"/>
+          </a:xfrm>
+          <a:prstGeom prst="roundRect">
+            <a:avLst>
+              <a:gd name="adj" fmla="val 50000"/>
+            </a:avLst>
+          </a:prstGeom>
+          <a:solidFill>
+            <a:srgbClr val="D5E5F8"/>
+          </a:solidFill>
+          <a:ln w="12700">
+            <a:solidFill>
+              <a:srgbClr val="D5E5F8"/>
+            </a:solidFill>
+            <a:prstDash val="solid"/>
+          </a:ln>
+        </p:spPr>
+      </p:sp>
+      <p:sp>
+        <p:nvSpPr>
+          <p:cNvPr id="47" name="Text 45"/>
+          <p:cNvSpPr txBox="1"/>
+          <p:nvPr/>
+        </p:nvSpPr>
+        <p:spPr>
+          <a:xfrm>
+            <a:off x="8347253" y="5084064"/>
+            <a:ext cx="1196035" cy="274320"/>
+          </a:xfrm>
+          <a:prstGeom prst="rect">
+            <a:avLst/>
+          </a:prstGeom>
+          <a:noFill/>
+          <a:ln/>
+        </p:spPr>
+        <p:txBody>
+          <a:bodyPr wrap="square" lIns="0" tIns="0" rIns="0" bIns="0" rtlCol="0" anchor="ctr"/>
+          <a:lstStyle/>
+          <a:p>
+            <a:pPr algn="ctr" indent="0" marL="0">
+              <a:buNone/>
+            </a:pPr>
+            <a:r>
+              <a:rPr lang="en-US" sz="850" b="1" dirty="0">
+                <a:solidFill>
+                  <a:srgbClr val="34648F"/>
+                </a:solidFill>
+                <a:latin typeface="Poppins" pitchFamily="34" charset="0"/>
+                <a:ea typeface="Poppins" pitchFamily="34" charset="-122"/>
+                <a:cs typeface="Poppins" pitchFamily="34" charset="-120"/>
+              </a:rPr>
+              <a:t>onCall · HTTPS</a:t>
+            </a:r>
+            <a:endParaRPr lang="en-US" sz="850" dirty="0"/>
+          </a:p>
+        </p:txBody>
+      </p:sp>
+      <p:sp>
+        <p:nvSpPr>
+          <p:cNvPr id="48" name="Text 46"/>
+          <p:cNvSpPr txBox="1"/>
+          <p:nvPr/>
+        </p:nvSpPr>
+        <p:spPr>
+          <a:xfrm>
+            <a:off x="8347253" y="5449824"/>
+            <a:ext cx="3039770" cy="292608"/>
+          </a:xfrm>
+          <a:prstGeom prst="rect">
+            <a:avLst/>
+          </a:prstGeom>
+          <a:noFill/>
+          <a:ln/>
+        </p:spPr>
+        <p:txBody>
+          <a:bodyPr wrap="square" lIns="0" tIns="0" rIns="0" bIns="0" rtlCol="0" anchor="ctr"/>
+          <a:lstStyle/>
+          <a:p>
+            <a:pPr indent="0" marL="0">
+              <a:buNone/>
+            </a:pPr>
+            <a:r>
+              <a:rPr lang="en-US" sz="1200" b="1" dirty="0">
+                <a:solidFill>
+                  <a:srgbClr val="2B2640"/>
+                </a:solidFill>
+                <a:latin typeface="Poppins" pitchFamily="34" charset="0"/>
+                <a:ea typeface="Poppins" pitchFamily="34" charset="-122"/>
+                <a:cs typeface="Poppins" pitchFamily="34" charset="-120"/>
+              </a:rPr>
+              <a:t>setUserRole</a:t>
+            </a:r>
+            <a:endParaRPr lang="en-US" sz="1200" dirty="0"/>
+          </a:p>
+        </p:txBody>
+      </p:sp>
+      <p:sp>
+        <p:nvSpPr>
+          <p:cNvPr id="49" name="Text 47"/>
+          <p:cNvSpPr txBox="1"/>
+          <p:nvPr/>
+        </p:nvSpPr>
+        <p:spPr>
+          <a:xfrm>
+            <a:off x="8347253" y="5760720"/>
+            <a:ext cx="3039770" cy="457200"/>
+          </a:xfrm>
+          <a:prstGeom prst="rect">
+            <a:avLst/>
+          </a:prstGeom>
+          <a:noFill/>
+          <a:ln/>
+        </p:spPr>
+        <p:txBody>
+          <a:bodyPr wrap="square" lIns="0" tIns="0" rIns="0" bIns="0" rtlCol="0" anchor="ctr"/>
+          <a:lstStyle/>
+          <a:p>
+            <a:pPr indent="0" marL="0">
+              <a:lnSpc>
+                <a:spcPct val="118000"/>
+              </a:lnSpc>
+              <a:buNone/>
+            </a:pPr>
+            <a:r>
+              <a:rPr lang="en-US" sz="960" dirty="0">
+                <a:solidFill>
+                  <a:srgbClr val="76708E"/>
+                </a:solidFill>
+                <a:latin typeface="Poppins" pitchFamily="34" charset="0"/>
+                <a:ea typeface="Poppins" pitchFamily="34" charset="-122"/>
+                <a:cs typeface="Poppins" pitchFamily="34" charset="-120"/>
+              </a:rPr>
+              <a:t>Admin only — sets the Firebase custom claim and the user document role.</a:t>
+            </a:r>
+            <a:endParaRPr lang="en-US" sz="960" dirty="0"/>
           </a:p>
         </p:txBody>
       </p:sp>
